--- a/reports/10-customer-funnel.pptx
+++ b/reports/10-customer-funnel.pptx
@@ -107,7 +107,7 @@
   <p:extLst>
     <p:ext uri="{521415D9-36F7-43E2-AB2F-B90AF26B5E84}">
       <p14:sectionLst xmlns:p14="http://schemas.microsoft.com/office/powerpoint/2010/main">
-        <p14:section name="Customer funnel" id="{4cb40282-07f0-7db0-ad8c-64fa8a51b9f1}">
+        <p14:section name="Customer funnel" id="{18070db7-ee90-ca7f-4d72-887df1f47515}">
           <p14:sldIdLst>
             <p14:sldId id="256"/>
           </p14:sldIdLst>
@@ -341,20 +341,9 @@
           <c:max val="450"/>
           <c:min val="0"/>
         </c:scaling>
-        <c:delete val="0"/>
+        <c:delete val="1"/>
         <c:axPos val="b"/>
-        <c:majorGridlines>
-          <c:spPr>
-            <a:ln w="6350" cap="flat">
-              <a:solidFill>
-                <a:srgbClr val="E1E0D9"/>
-              </a:solidFill>
-              <a:prstDash val="solid"/>
-              <a:round/>
-            </a:ln>
-          </c:spPr>
-        </c:majorGridlines>
-        <c:numFmt formatCode="0&quot;k&quot;" sourceLinked="0"/>
+        <c:numFmt formatCode="General" sourceLinked="0"/>
         <c:majorTickMark val="out"/>
         <c:minorTickMark val="none"/>
         <c:tickLblPos val="low"/>
@@ -383,7 +372,6 @@
         <c:crossAx val="2094734554"/>
         <c:crosses val="autoZero"/>
         <c:crossBetween val="between"/>
-        <c:majorUnit val="100"/>
       </c:valAx>
       <c:spPr>
         <a:noFill/>
@@ -1448,10 +1436,10 @@
             <a:tbl>
               <a:tblPr/>
               <a:tblGrid>
-                <a:gridCol w="1920240"/>
-                <a:gridCol w="868680"/>
-                <a:gridCol w="914400"/>
-                <a:gridCol w="944575"/>
+                <a:gridCol w="1783080"/>
+                <a:gridCol w="731520"/>
+                <a:gridCol w="1097280"/>
+                <a:gridCol w="1036015"/>
               </a:tblGrid>
               <a:tr h="274320">
                 <a:tc>
@@ -1514,7 +1502,7 @@
                             <a:srgbClr val="5F6480"/>
                           </a:solidFill>
                         </a:rPr>
-                        <a:t>CONVERSION</a:t>
+                        <a:t>RATE</a:t>
                       </a:r>
                       <a:endParaRPr lang="en-US" sz="900" dirty="0"/>
                     </a:p>
@@ -2596,7 +2584,7 @@
                             <a:srgbClr val="1F2340"/>
                           </a:solidFill>
                         </a:rPr>
-                        <a:t>Start → Funded (end to end)</a:t>
+                        <a:t>Start → Funded, overall</a:t>
                       </a:r>
                       <a:endParaRPr lang="en-US" sz="1100" dirty="0"/>
                     </a:p>
